--- a/management-seminars/week07_qa_strategies.pptx
+++ b/management-seminars/week07_qa_strategies.pptx
@@ -11,6 +11,7 @@
     <p:sldId id="269" r:id="rId20"/>
     <p:sldId id="270" r:id="rId21"/>
     <p:sldId id="271" r:id="rId22"/>
+    <p:sldId id="272" r:id="rId11"/>
   </p:sldIdLst>
   <p:notesMasterIdLst>
     <p:notesMasterId r:id="rId12"/>
@@ -857,6 +858,76 @@
           <a:p>
             <a:r>
               <a:t>The most dangerous errors produce believable numbers. External benchmarks (CMS public data, industry reports) give a reasonable range. A log of errors shows patterns that point to process fixes.</a:t>
+            </a:r>
+          </a:p>
+        </p:txBody>
+      </p:sp>
+      <p:sp>
+        <p:nvSpPr>
+          <p:cNvPr id="4" name="Slide Number Placeholder 3"/>
+          <p:cNvSpPr>
+            <a:spLocks noGrp="1"/>
+          </p:cNvSpPr>
+          <p:nvPr>
+            <p:ph type="sldNum" idx="5" sz="quarter"/>
+          </p:nvPr>
+        </p:nvSpPr>
+        <p:spPr/>
+      </p:sp>
+    </p:spTree>
+  </p:cSld>
+  <p:clrMapOvr>
+    <a:masterClrMapping/>
+  </p:clrMapOvr>
+</p:notes>
+</file>
+
+<file path=ppt/notesSlides/notesSlide7.xml><?xml version="1.0" encoding="utf-8"?>
+<p:notes xmlns:a="http://schemas.openxmlformats.org/drawingml/2006/main" xmlns:p="http://schemas.openxmlformats.org/presentationml/2006/main" xmlns:r="http://schemas.openxmlformats.org/officeDocument/2006/relationships">
+  <p:cSld>
+    <p:spTree>
+      <p:nvGrpSpPr>
+        <p:cNvPr id="1" name=""/>
+        <p:cNvGrpSpPr/>
+        <p:nvPr/>
+      </p:nvGrpSpPr>
+      <p:grpSpPr>
+        <a:xfrm>
+          <a:off x="0" y="0"/>
+          <a:ext cx="0" cy="0"/>
+          <a:chOff x="0" y="0"/>
+          <a:chExt cx="0" cy="0"/>
+        </a:xfrm>
+      </p:grpSpPr>
+      <p:sp>
+        <p:nvSpPr>
+          <p:cNvPr id="2" name="Slide Image Placeholder 1"/>
+          <p:cNvSpPr>
+            <a:spLocks noGrp="1"/>
+          </p:cNvSpPr>
+          <p:nvPr>
+            <p:ph type="sldImg" idx="2"/>
+          </p:nvPr>
+        </p:nvSpPr>
+        <p:spPr/>
+      </p:sp>
+      <p:sp>
+        <p:nvSpPr>
+          <p:cNvPr id="3" name="Notes Placeholder 2"/>
+          <p:cNvSpPr>
+            <a:spLocks noGrp="1"/>
+          </p:cNvSpPr>
+          <p:nvPr>
+            <p:ph type="body" idx="3" sz="quarter"/>
+          </p:nvPr>
+        </p:nvSpPr>
+        <p:spPr/>
+        <p:txBody>
+          <a:bodyPr/>
+          <a:lstStyle/>
+          <a:p>
+            <a:r>
+              <a:t>Give students a few minutes to write an answer drawn from their own experience and career, then ask two or three to share. Connect their examples back to this seminar's content. In an online section, post the same question to the discussion board.</a:t>
             </a:r>
           </a:p>
         </p:txBody>
@@ -1506,7 +1577,7 @@
 </p:sldMaster>
 </file>
 
-<file path=ppt/slides/slide11.xml><?xml version="1.0" encoding="utf-8"?>
+<file path=ppt/slides/slide1.xml><?xml version="1.0" encoding="utf-8"?>
 <p:sld xmlns:a="http://schemas.openxmlformats.org/drawingml/2006/main" xmlns:p="http://schemas.openxmlformats.org/presentationml/2006/main" xmlns:r="http://schemas.openxmlformats.org/officeDocument/2006/relationships">
   <p:cSld>
     <p:spTree>
@@ -1600,7 +1671,7 @@
 </p:sld>
 </file>
 
-<file path=ppt/slides/slide12.xml><?xml version="1.0" encoding="utf-8"?>
+<file path=ppt/slides/slide2.xml><?xml version="1.0" encoding="utf-8"?>
 <p:sld xmlns:a="http://schemas.openxmlformats.org/drawingml/2006/main" xmlns:p="http://schemas.openxmlformats.org/presentationml/2006/main" xmlns:r="http://schemas.openxmlformats.org/officeDocument/2006/relationships">
   <p:cSld>
     <p:spTree>
@@ -1797,7 +1868,7 @@
 </p:sld>
 </file>
 
-<file path=ppt/slides/slide13.xml><?xml version="1.0" encoding="utf-8"?>
+<file path=ppt/slides/slide3.xml><?xml version="1.0" encoding="utf-8"?>
 <p:sld xmlns:a="http://schemas.openxmlformats.org/drawingml/2006/main" xmlns:p="http://schemas.openxmlformats.org/presentationml/2006/main" xmlns:r="http://schemas.openxmlformats.org/officeDocument/2006/relationships">
   <p:cSld>
     <p:spTree>
@@ -1994,7 +2065,7 @@
 </p:sld>
 </file>
 
-<file path=ppt/slides/slide14.xml><?xml version="1.0" encoding="utf-8"?>
+<file path=ppt/slides/slide4.xml><?xml version="1.0" encoding="utf-8"?>
 <p:sld xmlns:a="http://schemas.openxmlformats.org/drawingml/2006/main" xmlns:p="http://schemas.openxmlformats.org/presentationml/2006/main" xmlns:r="http://schemas.openxmlformats.org/officeDocument/2006/relationships">
   <p:cSld>
     <p:spTree>
@@ -2191,7 +2262,7 @@
 </p:sld>
 </file>
 
-<file path=ppt/slides/slide15.xml><?xml version="1.0" encoding="utf-8"?>
+<file path=ppt/slides/slide5.xml><?xml version="1.0" encoding="utf-8"?>
 <p:sld xmlns:a="http://schemas.openxmlformats.org/drawingml/2006/main" xmlns:p="http://schemas.openxmlformats.org/presentationml/2006/main" xmlns:r="http://schemas.openxmlformats.org/officeDocument/2006/relationships">
   <p:cSld>
     <p:spTree>
@@ -2370,7 +2441,7 @@
 </p:sld>
 </file>
 
-<file path=ppt/slides/slide16.xml><?xml version="1.0" encoding="utf-8"?>
+<file path=ppt/slides/slide6.xml><?xml version="1.0" encoding="utf-8"?>
 <p:sld xmlns:a="http://schemas.openxmlformats.org/drawingml/2006/main" xmlns:p="http://schemas.openxmlformats.org/presentationml/2006/main" xmlns:r="http://schemas.openxmlformats.org/officeDocument/2006/relationships">
   <p:cSld>
     <p:spTree>
@@ -2536,6 +2607,167 @@
             <a:fld id="{F7021451-1387-4CA6-816F-3879F97B5CBC}" type="slidenum">
               <a:rPr b="0" lang="en-US"/>
               <a:t>6</a:t>
+            </a:fld>
+            <a:endParaRPr lang="en-US"/>
+          </a:p>
+        </p:txBody>
+      </p:sp>
+    </p:spTree>
+  </p:cSld>
+  <p:clrMapOvr>
+    <a:masterClrMapping/>
+  </p:clrMapOvr>
+</p:sld>
+</file>
+
+<file path=ppt/slides/slide7.xml><?xml version="1.0" encoding="utf-8"?>
+<p:sld xmlns:a="http://schemas.openxmlformats.org/drawingml/2006/main" xmlns:p="http://schemas.openxmlformats.org/presentationml/2006/main" xmlns:r="http://schemas.openxmlformats.org/officeDocument/2006/relationships">
+  <p:cSld>
+    <p:spTree>
+      <p:nvGrpSpPr>
+        <p:cNvPr id="1" name=""/>
+        <p:cNvGrpSpPr/>
+        <p:nvPr/>
+      </p:nvGrpSpPr>
+      <p:grpSpPr/>
+      <p:sp>
+        <p:nvSpPr>
+          <p:cNvPr id="2" name="Text 0"/>
+          <p:cNvSpPr/>
+          <p:nvPr>
+            <p:ph idx="100" type="title" hasCustomPrompt="1"/>
+          </p:nvPr>
+        </p:nvSpPr>
+        <p:spPr>
+          <a:xfrm>
+            <a:off x="731520" y="457200"/>
+            <a:ext cx="10698480" cy="822960"/>
+          </a:xfrm>
+          <a:prstGeom prst="rect">
+            <a:avLst/>
+          </a:prstGeom>
+          <a:noFill/>
+          <a:ln/>
+        </p:spPr>
+        <p:txBody>
+          <a:bodyPr wrap="square" lIns="0" tIns="0" rIns="0" bIns="0" rtlCol="0" anchor="t"/>
+          <a:lstStyle/>
+          <a:p>
+            <a:pPr algn="l" indent="0" marL="0">
+              <a:buNone/>
+            </a:pPr>
+            <a:r>
+              <a:rPr lang="en-US" sz="3200" b="1" dirty="0">
+                <a:solidFill>
+                  <a:srgbClr val="FFFFFF"/>
+                </a:solidFill>
+              </a:rPr>
+              <a:t>Discussion</a:t>
+            </a:r>
+            <a:endParaRPr lang="en-US" sz="3200" dirty="0"/>
+          </a:p>
+        </p:txBody>
+      </p:sp>
+      <p:sp>
+        <p:nvSpPr>
+          <p:cNvPr id="3" name="Text 0"/>
+          <p:cNvSpPr/>
+          <p:nvPr>
+            <p:ph idx="101" type="body" hasCustomPrompt="1"/>
+          </p:nvPr>
+        </p:nvSpPr>
+        <p:spPr>
+          <a:xfrm>
+            <a:off x="731520" y="1554480"/>
+            <a:ext cx="10698480" cy="4754880"/>
+          </a:xfrm>
+          <a:prstGeom prst="rect">
+            <a:avLst/>
+          </a:prstGeom>
+          <a:noFill/>
+          <a:ln/>
+        </p:spPr>
+        <p:txBody>
+          <a:bodyPr wrap="square" rtlCol="0" anchor="t"/>
+          <a:lstStyle/>
+          <a:p>
+            <a:pPr algn="l" marL="342900" indent="-342900">
+              <a:spcAft>
+                <a:spcPts val="1000"/>
+              </a:spcAft>
+              <a:buSzPct val="100000"/>
+              <a:buChar char="•"/>
+            </a:pPr>
+            <a:r>
+              <a:rPr lang="en-US" sz="2400" dirty="0">
+                <a:solidFill>
+                  <a:srgbClr val="FFFFFF"/>
+                </a:solidFill>
+              </a:rPr>
+              <a:t>Recall a time a wrong number reached a decision maker. Which quality check would have caught it?</a:t>
+            </a:r>
+            <a:endParaRPr lang="en-US" sz="2400" dirty="0"/>
+          </a:p>
+          <a:p>
+            <a:pPr algn="l" marL="342900" indent="-342900">
+              <a:spcAft>
+                <a:spcPts val="1000"/>
+              </a:spcAft>
+              <a:buSzPct val="100000"/>
+              <a:buChar char="•"/>
+            </a:pPr>
+            <a:r>
+              <a:rPr lang="en-US" sz="2400" dirty="0">
+                <a:solidFill>
+                  <a:srgbClr val="FFFFFF"/>
+                </a:solidFill>
+              </a:rPr>
+              <a:t>Draw on your own experience and career, and apply today's seminar to that setting.</a:t>
+            </a:r>
+            <a:endParaRPr lang="en-US" sz="2400" dirty="0"/>
+          </a:p>
+        </p:txBody>
+      </p:sp>
+      <p:sp>
+        <p:nvSpPr>
+          <p:cNvPr id="25" name="Slide Number Placeholder 0"/>
+          <p:cNvSpPr>
+            <a:spLocks noGrp="1"/>
+          </p:cNvSpPr>
+          <p:nvPr>
+            <p:ph type="sldNum" sz="quarter" idx="4294967295"/>
+          </p:nvPr>
+        </p:nvSpPr>
+        <p:spPr>
+          <a:xfrm>
+            <a:off x="10972800" y="6400800"/>
+            <a:ext cx="548640" cy="274320"/>
+          </a:xfrm>
+          <a:prstGeom prst="rect">
+            <a:avLst/>
+          </a:prstGeom>
+          <a:extLst>
+            <a:ext uri="{C572A759-6A51-4108-AA02-DFA0A04FC94B}">
+              <ma14:wrappingTextBoxFlag xmlns:ma14="http://schemas.microsoft.com/office/mac/drawingml/2011/main" val="0"/>
+            </a:ext>
+          </a:extLst>
+        </p:spPr>
+        <p:txBody>
+          <a:bodyPr/>
+          <a:lstStyle>
+            <a:lvl1pPr>
+              <a:defRPr sz="1000">
+                <a:solidFill>
+                  <a:srgbClr val="BFBFBF"/>
+                </a:solidFill>
+              </a:defRPr>
+            </a:lvl1pPr>
+          </a:lstStyle>
+          <a:p>
+            <a:pPr algn="r"/>
+            <a:fld id="{F7021451-1387-4CA6-816F-3879F97B5CBC}" type="slidenum">
+              <a:rPr b="0" lang="en-US"/>
+              <a:t>7</a:t>
             </a:fld>
             <a:endParaRPr lang="en-US"/>
           </a:p>

--- a/management-seminars/week07_qa_strategies.pptx
+++ b/management-seminars/week07_qa_strategies.pptx
@@ -1619,7 +1619,7 @@
                   <a:srgbClr val="FFFFFF"/>
                 </a:solidFill>
               </a:rPr>
-              <a:t>Overview of Quality Assurance Strategies</a:t>
+              <a:t>Week 7: Overview of Quality Assurance Strategies</a:t>
             </a:r>
             <a:endParaRPr lang="en-US" sz="4000" dirty="0"/>
           </a:p>
